--- a/exports/pptx/lessons/middle-module-03-ayurveda-good-health/day-08-project-session-1.pptx
+++ b/exports/pptx/lessons/middle-module-03-ayurveda-good-health/day-08-project-session-1.pptx
@@ -14,9 +14,12 @@
     <p:sldId id="262" r:id="rId8"/>
     <p:sldId id="263" r:id="rId9"/>
     <p:sldId id="264" r:id="rId10"/>
+    <p:sldId id="265" r:id="rId11"/>
+    <p:sldId id="266" r:id="rId12"/>
+    <p:sldId id="267" r:id="rId13"/>
   </p:sldIdLst>
   <p:notesMasterIdLst>
-    <p:notesMasterId r:id="rId11"/>
+    <p:notesMasterId r:id="rId14"/>
   </p:notesMasterIdLst>
   <p:sldSz cx="9144000" cy="5143500"/>
   <p:notesSz cx="5143500" cy="9144000"/>
@@ -534,6 +537,270 @@
             <a:fld id="{F7021451-1387-4CA6-816F-3879F97B5CBC}" type="slidenum">
               <a:rPr lang="en-US"/>
               <a:t>1</a:t>
+            </a:fld>
+            <a:endParaRPr lang="en-US"/>
+          </a:p>
+        </p:txBody>
+      </p:sp>
+    </p:spTree>
+    <p:extLst>
+      <p:ext uri="{BB962C8B-B14F-4D97-AF65-F5344CB8AC3E}">
+        <p14:creationId xmlns:p14="http://schemas.microsoft.com/office/powerpoint/2010/main" val="1024086991"/>
+      </p:ext>
+    </p:extLst>
+  </p:cSld>
+  <p:clrMapOvr>
+    <a:masterClrMapping/>
+  </p:clrMapOvr>
+</p:notes>
+</file>
+
+<file path=ppt/notesSlides/notesSlide10.xml><?xml version="1.0" encoding="utf-8"?>
+<p:notes xmlns:a="http://schemas.openxmlformats.org/drawingml/2006/main" xmlns:r="http://schemas.openxmlformats.org/officeDocument/2006/relationships" xmlns:p="http://schemas.openxmlformats.org/presentationml/2006/main">
+  <p:cSld>
+    <p:spTree>
+      <p:nvGrpSpPr>
+        <p:cNvPr id="1" name=""/>
+        <p:cNvGrpSpPr/>
+        <p:nvPr/>
+      </p:nvGrpSpPr>
+      <p:grpSpPr>
+        <a:xfrm>
+          <a:off x="0" y="0"/>
+          <a:ext cx="0" cy="0"/>
+          <a:chOff x="0" y="0"/>
+          <a:chExt cx="0" cy="0"/>
+        </a:xfrm>
+      </p:grpSpPr>
+      <p:sp>
+        <p:nvSpPr>
+          <p:cNvPr id="2" name="Slide Image Placeholder 1"/>
+          <p:cNvSpPr>
+            <a:spLocks noGrp="1" noRot="1" noChangeAspect="1"/>
+          </p:cNvSpPr>
+          <p:nvPr>
+            <p:ph type="sldImg"/>
+          </p:nvPr>
+        </p:nvSpPr>
+        <p:spPr/>
+      </p:sp>
+      <p:sp>
+        <p:nvSpPr>
+          <p:cNvPr id="3" name="Notes Placeholder 2"/>
+          <p:cNvSpPr>
+            <a:spLocks noGrp="1"/>
+          </p:cNvSpPr>
+          <p:nvPr>
+            <p:ph type="body" idx="1"/>
+          </p:nvPr>
+        </p:nvSpPr>
+        <p:spPr/>
+        <p:txBody>
+          <a:bodyPr/>
+          <a:lstStyle/>
+          <a:p>
+            <a:r>
+              <a:rPr lang="en-US" dirty="0"/>
+              <a:t/>
+            </a:r>
+            <a:endParaRPr lang="en-US" dirty="0"/>
+          </a:p>
+        </p:txBody>
+      </p:sp>
+      <p:sp>
+        <p:nvSpPr>
+          <p:cNvPr id="4" name="Slide Number Placeholder 3"/>
+          <p:cNvSpPr>
+            <a:spLocks noGrp="1"/>
+          </p:cNvSpPr>
+          <p:nvPr>
+            <p:ph type="sldNum" sz="quarter" idx="10"/>
+          </p:nvPr>
+        </p:nvSpPr>
+        <p:spPr/>
+        <p:txBody>
+          <a:bodyPr/>
+          <a:lstStyle/>
+          <a:p>
+            <a:fld id="{F7021451-1387-4CA6-816F-3879F97B5CBC}" type="slidenum">
+              <a:rPr lang="en-US"/>
+              <a:t>10</a:t>
+            </a:fld>
+            <a:endParaRPr lang="en-US"/>
+          </a:p>
+        </p:txBody>
+      </p:sp>
+    </p:spTree>
+    <p:extLst>
+      <p:ext uri="{BB962C8B-B14F-4D97-AF65-F5344CB8AC3E}">
+        <p14:creationId xmlns:p14="http://schemas.microsoft.com/office/powerpoint/2010/main" val="1024086991"/>
+      </p:ext>
+    </p:extLst>
+  </p:cSld>
+  <p:clrMapOvr>
+    <a:masterClrMapping/>
+  </p:clrMapOvr>
+</p:notes>
+</file>
+
+<file path=ppt/notesSlides/notesSlide11.xml><?xml version="1.0" encoding="utf-8"?>
+<p:notes xmlns:a="http://schemas.openxmlformats.org/drawingml/2006/main" xmlns:r="http://schemas.openxmlformats.org/officeDocument/2006/relationships" xmlns:p="http://schemas.openxmlformats.org/presentationml/2006/main">
+  <p:cSld>
+    <p:spTree>
+      <p:nvGrpSpPr>
+        <p:cNvPr id="1" name=""/>
+        <p:cNvGrpSpPr/>
+        <p:nvPr/>
+      </p:nvGrpSpPr>
+      <p:grpSpPr>
+        <a:xfrm>
+          <a:off x="0" y="0"/>
+          <a:ext cx="0" cy="0"/>
+          <a:chOff x="0" y="0"/>
+          <a:chExt cx="0" cy="0"/>
+        </a:xfrm>
+      </p:grpSpPr>
+      <p:sp>
+        <p:nvSpPr>
+          <p:cNvPr id="2" name="Slide Image Placeholder 1"/>
+          <p:cNvSpPr>
+            <a:spLocks noGrp="1" noRot="1" noChangeAspect="1"/>
+          </p:cNvSpPr>
+          <p:nvPr>
+            <p:ph type="sldImg"/>
+          </p:nvPr>
+        </p:nvSpPr>
+        <p:spPr/>
+      </p:sp>
+      <p:sp>
+        <p:nvSpPr>
+          <p:cNvPr id="3" name="Notes Placeholder 2"/>
+          <p:cNvSpPr>
+            <a:spLocks noGrp="1"/>
+          </p:cNvSpPr>
+          <p:nvPr>
+            <p:ph type="body" idx="1"/>
+          </p:nvPr>
+        </p:nvSpPr>
+        <p:spPr/>
+        <p:txBody>
+          <a:bodyPr/>
+          <a:lstStyle/>
+          <a:p>
+            <a:r>
+              <a:rPr lang="en-US" dirty="0"/>
+              <a:t/>
+            </a:r>
+            <a:endParaRPr lang="en-US" dirty="0"/>
+          </a:p>
+        </p:txBody>
+      </p:sp>
+      <p:sp>
+        <p:nvSpPr>
+          <p:cNvPr id="4" name="Slide Number Placeholder 3"/>
+          <p:cNvSpPr>
+            <a:spLocks noGrp="1"/>
+          </p:cNvSpPr>
+          <p:nvPr>
+            <p:ph type="sldNum" sz="quarter" idx="10"/>
+          </p:nvPr>
+        </p:nvSpPr>
+        <p:spPr/>
+        <p:txBody>
+          <a:bodyPr/>
+          <a:lstStyle/>
+          <a:p>
+            <a:fld id="{F7021451-1387-4CA6-816F-3879F97B5CBC}" type="slidenum">
+              <a:rPr lang="en-US"/>
+              <a:t>11</a:t>
+            </a:fld>
+            <a:endParaRPr lang="en-US"/>
+          </a:p>
+        </p:txBody>
+      </p:sp>
+    </p:spTree>
+    <p:extLst>
+      <p:ext uri="{BB962C8B-B14F-4D97-AF65-F5344CB8AC3E}">
+        <p14:creationId xmlns:p14="http://schemas.microsoft.com/office/powerpoint/2010/main" val="1024086991"/>
+      </p:ext>
+    </p:extLst>
+  </p:cSld>
+  <p:clrMapOvr>
+    <a:masterClrMapping/>
+  </p:clrMapOvr>
+</p:notes>
+</file>
+
+<file path=ppt/notesSlides/notesSlide12.xml><?xml version="1.0" encoding="utf-8"?>
+<p:notes xmlns:a="http://schemas.openxmlformats.org/drawingml/2006/main" xmlns:r="http://schemas.openxmlformats.org/officeDocument/2006/relationships" xmlns:p="http://schemas.openxmlformats.org/presentationml/2006/main">
+  <p:cSld>
+    <p:spTree>
+      <p:nvGrpSpPr>
+        <p:cNvPr id="1" name=""/>
+        <p:cNvGrpSpPr/>
+        <p:nvPr/>
+      </p:nvGrpSpPr>
+      <p:grpSpPr>
+        <a:xfrm>
+          <a:off x="0" y="0"/>
+          <a:ext cx="0" cy="0"/>
+          <a:chOff x="0" y="0"/>
+          <a:chExt cx="0" cy="0"/>
+        </a:xfrm>
+      </p:grpSpPr>
+      <p:sp>
+        <p:nvSpPr>
+          <p:cNvPr id="2" name="Slide Image Placeholder 1"/>
+          <p:cNvSpPr>
+            <a:spLocks noGrp="1" noRot="1" noChangeAspect="1"/>
+          </p:cNvSpPr>
+          <p:nvPr>
+            <p:ph type="sldImg"/>
+          </p:nvPr>
+        </p:nvSpPr>
+        <p:spPr/>
+      </p:sp>
+      <p:sp>
+        <p:nvSpPr>
+          <p:cNvPr id="3" name="Notes Placeholder 2"/>
+          <p:cNvSpPr>
+            <a:spLocks noGrp="1"/>
+          </p:cNvSpPr>
+          <p:nvPr>
+            <p:ph type="body" idx="1"/>
+          </p:nvPr>
+        </p:nvSpPr>
+        <p:spPr/>
+        <p:txBody>
+          <a:bodyPr/>
+          <a:lstStyle/>
+          <a:p>
+            <a:r>
+              <a:rPr lang="en-US" dirty="0"/>
+              <a:t/>
+            </a:r>
+            <a:endParaRPr lang="en-US" dirty="0"/>
+          </a:p>
+        </p:txBody>
+      </p:sp>
+      <p:sp>
+        <p:nvSpPr>
+          <p:cNvPr id="4" name="Slide Number Placeholder 3"/>
+          <p:cNvSpPr>
+            <a:spLocks noGrp="1"/>
+          </p:cNvSpPr>
+          <p:nvPr>
+            <p:ph type="sldNum" sz="quarter" idx="10"/>
+          </p:nvPr>
+        </p:nvSpPr>
+        <p:spPr/>
+        <p:txBody>
+          <a:bodyPr/>
+          <a:lstStyle/>
+          <a:p>
+            <a:fld id="{F7021451-1387-4CA6-816F-3879F97B5CBC}" type="slidenum">
+              <a:rPr lang="en-US"/>
+              <a:t>12</a:t>
             </a:fld>
             <a:endParaRPr lang="en-US"/>
           </a:p>
@@ -1787,7 +2054,117 @@
         </p:nvSpPr>
         <p:spPr>
           <a:xfrm>
-            <a:off x="406301" y="1223963"/>
+            <a:off x="406301" y="4434929"/>
+            <a:ext cx="8498026" cy="213271"/>
+          </a:xfrm>
+          <a:prstGeom prst="rect">
+            <a:avLst/>
+          </a:prstGeom>
+          <a:noFill/>
+          <a:ln/>
+        </p:spPr>
+        <p:txBody>
+          <a:bodyPr wrap="square" lIns="0" tIns="0" rIns="0" bIns="0" rtlCol="0" anchor="t"/>
+          <a:lstStyle/>
+          <a:p>
+            <a:pPr algn="l" indent="0" marL="0">
+              <a:lnSpc>
+                <a:spcPts val="1680"/>
+              </a:lnSpc>
+              <a:spcBef>
+                <a:spcPts val="300"/>
+              </a:spcBef>
+              <a:spcAft>
+                <a:spcPts val="300"/>
+              </a:spcAft>
+              <a:buNone/>
+            </a:pPr>
+            <a:r>
+              <a:rPr lang="en-US" sz="1200" dirty="0">
+                <a:solidFill>
+                  <a:srgbClr val="1C2833"/>
+                </a:solidFill>
+                <a:latin typeface="Arial" pitchFamily="34" charset="0"/>
+                <a:ea typeface="Arial" pitchFamily="34" charset="-122"/>
+                <a:cs typeface="Arial" pitchFamily="34" charset="-120"/>
+              </a:rPr>
+              <a:t>Middle ·  · IKS Curriculum</a:t>
+            </a:r>
+            <a:endParaRPr lang="en-US" sz="1200" dirty="0"/>
+          </a:p>
+        </p:txBody>
+      </p:sp>
+    </p:spTree>
+  </p:cSld>
+  <p:clrMapOvr>
+    <a:masterClrMapping/>
+  </p:clrMapOvr>
+</p:sld>
+</file>
+
+<file path=ppt/slides/slide10.xml><?xml version="1.0" encoding="utf-8"?>
+<p:sld xmlns:a="http://schemas.openxmlformats.org/drawingml/2006/main" xmlns:r="http://schemas.openxmlformats.org/officeDocument/2006/relationships" xmlns:p="http://schemas.openxmlformats.org/presentationml/2006/main">
+  <p:cSld name="Slide 10">
+    <p:bg>
+      <p:bgPr>
+        <a:solidFill>
+          <a:srgbClr val="FFFFFF"/>
+        </a:solidFill>
+      </p:bgPr>
+    </p:bg>
+    <p:spTree>
+      <p:nvGrpSpPr>
+        <p:cNvPr id="1" name=""/>
+        <p:cNvGrpSpPr/>
+        <p:nvPr/>
+      </p:nvGrpSpPr>
+      <p:grpSpPr>
+        <a:xfrm>
+          <a:off x="0" y="0"/>
+          <a:ext cx="0" cy="0"/>
+          <a:chOff x="0" y="0"/>
+          <a:chExt cx="0" cy="0"/>
+        </a:xfrm>
+      </p:grpSpPr>
+      <p:sp>
+        <p:nvSpPr>
+          <p:cNvPr id="2" name="Text 0"/>
+          <p:cNvSpPr/>
+          <p:nvPr/>
+        </p:nvSpPr>
+        <p:spPr>
+          <a:xfrm>
+            <a:off x="0" y="0"/>
+            <a:ext cx="9144000" cy="101501"/>
+          </a:xfrm>
+          <a:prstGeom prst="rect">
+            <a:avLst/>
+          </a:prstGeom>
+          <a:solidFill>
+            <a:srgbClr val="277884"/>
+          </a:solidFill>
+          <a:ln/>
+        </p:spPr>
+        <p:txBody>
+          <a:bodyPr wrap="square" rtlCol="0" anchor="ctr"/>
+          <a:lstStyle/>
+          <a:p>
+            <a:pPr indent="0" marL="0">
+              <a:buNone/>
+            </a:pPr>
+            <a:endParaRPr lang="en-US" dirty="0"/>
+          </a:p>
+        </p:txBody>
+      </p:sp>
+      <p:sp>
+        <p:nvSpPr>
+          <p:cNvPr id="3" name="Text 1"/>
+          <p:cNvSpPr/>
+          <p:nvPr/>
+        </p:nvSpPr>
+        <p:spPr>
+          <a:xfrm>
+            <a:off x="406301" y="457051"/>
             <a:ext cx="8498026" cy="274290"/>
           </a:xfrm>
           <a:prstGeom prst="rect">
@@ -1821,7 +2198,7 @@
                 <a:ea typeface="Georgia" pitchFamily="34" charset="-122"/>
                 <a:cs typeface="Georgia" pitchFamily="34" charset="-120"/>
               </a:rPr>
-              <a:t>Learning objective</a:t>
+              <a:t>Homework</a:t>
             </a:r>
             <a:endParaRPr lang="en-US" sz="1800" dirty="0"/>
           </a:p>
@@ -1829,14 +2206,14 @@
       </p:sp>
       <p:sp>
         <p:nvSpPr>
-          <p:cNvPr id="6" name="Text 4"/>
-          <p:cNvSpPr/>
-          <p:nvPr/>
-        </p:nvSpPr>
-        <p:spPr>
-          <a:xfrm>
-            <a:off x="406301" y="1637854"/>
-            <a:ext cx="8498026" cy="213271"/>
+          <p:cNvPr id="4" name="Text 2"/>
+          <p:cNvSpPr/>
+          <p:nvPr/>
+        </p:nvSpPr>
+        <p:spPr>
+          <a:xfrm>
+            <a:off x="634901" y="883593"/>
+            <a:ext cx="8102798" cy="281880"/>
           </a:xfrm>
           <a:prstGeom prst="rect">
             <a:avLst/>
@@ -1848,17 +2225,15 @@
           <a:bodyPr wrap="square" lIns="0" tIns="0" rIns="0" bIns="0" rtlCol="0" anchor="t"/>
           <a:lstStyle/>
           <a:p>
-            <a:pPr algn="l" indent="0" marL="0">
-              <a:lnSpc>
-                <a:spcPts val="1680"/>
-              </a:lnSpc>
-              <a:spcBef>
-                <a:spcPts val="300"/>
-              </a:spcBef>
-              <a:spcAft>
-                <a:spcPts val="300"/>
-              </a:spcAft>
-              <a:buNone/>
+            <a:pPr algn="l" marL="342900" indent="-342900">
+              <a:lnSpc>
+                <a:spcPts val="1620"/>
+              </a:lnSpc>
+              <a:spcAft>
+                <a:spcPts val="300"/>
+              </a:spcAft>
+              <a:buSzPct val="100000"/>
+              <a:buChar char="•"/>
             </a:pPr>
             <a:r>
               <a:rPr lang="en-US" sz="1200" dirty="0">
@@ -1869,7 +2244,7 @@
                 <a:ea typeface="Arial" pitchFamily="34" charset="-122"/>
                 <a:cs typeface="Arial" pitchFamily="34" charset="-120"/>
               </a:rPr>
-              <a:t>Each student drafts a 7-day dinacharya for themselves, with each practice paired to its Ayurvedic principle.</a:t>
+              <a:t>Try ONE day of your dinacharya tonight + tomorrow morning. Note what worked and what didn't.</a:t>
             </a:r>
             <a:endParaRPr lang="en-US" sz="1200" dirty="0"/>
           </a:p>
@@ -1877,7 +2252,503 @@
       </p:sp>
       <p:sp>
         <p:nvSpPr>
-          <p:cNvPr id="7" name="Text 5"/>
+          <p:cNvPr id="5" name="Text 3"/>
+          <p:cNvSpPr/>
+          <p:nvPr/>
+        </p:nvSpPr>
+        <p:spPr>
+          <a:xfrm>
+            <a:off x="406301" y="4434929"/>
+            <a:ext cx="8498026" cy="213271"/>
+          </a:xfrm>
+          <a:prstGeom prst="rect">
+            <a:avLst/>
+          </a:prstGeom>
+          <a:noFill/>
+          <a:ln/>
+        </p:spPr>
+        <p:txBody>
+          <a:bodyPr wrap="square" lIns="0" tIns="0" rIns="0" bIns="0" rtlCol="0" anchor="t"/>
+          <a:lstStyle/>
+          <a:p>
+            <a:pPr algn="l" indent="0" marL="0">
+              <a:lnSpc>
+                <a:spcPts val="1680"/>
+              </a:lnSpc>
+              <a:spcBef>
+                <a:spcPts val="300"/>
+              </a:spcBef>
+              <a:spcAft>
+                <a:spcPts val="300"/>
+              </a:spcAft>
+              <a:buNone/>
+            </a:pPr>
+            <a:r>
+              <a:rPr lang="en-US" sz="1200" dirty="0">
+                <a:solidFill>
+                  <a:srgbClr val="1C2833"/>
+                </a:solidFill>
+                <a:latin typeface="Arial" pitchFamily="34" charset="0"/>
+                <a:ea typeface="Arial" pitchFamily="34" charset="-122"/>
+                <a:cs typeface="Arial" pitchFamily="34" charset="-120"/>
+              </a:rPr>
+              <a:t>Middle ·  · IKS Curriculum</a:t>
+            </a:r>
+            <a:endParaRPr lang="en-US" sz="1200" dirty="0"/>
+          </a:p>
+        </p:txBody>
+      </p:sp>
+    </p:spTree>
+  </p:cSld>
+  <p:clrMapOvr>
+    <a:masterClrMapping/>
+  </p:clrMapOvr>
+</p:sld>
+</file>
+
+<file path=ppt/slides/slide11.xml><?xml version="1.0" encoding="utf-8"?>
+<p:sld xmlns:a="http://schemas.openxmlformats.org/drawingml/2006/main" xmlns:r="http://schemas.openxmlformats.org/officeDocument/2006/relationships" xmlns:p="http://schemas.openxmlformats.org/presentationml/2006/main">
+  <p:cSld name="Slide 11">
+    <p:bg>
+      <p:bgPr>
+        <a:solidFill>
+          <a:srgbClr val="FFFFFF"/>
+        </a:solidFill>
+      </p:bgPr>
+    </p:bg>
+    <p:spTree>
+      <p:nvGrpSpPr>
+        <p:cNvPr id="1" name=""/>
+        <p:cNvGrpSpPr/>
+        <p:nvPr/>
+      </p:nvGrpSpPr>
+      <p:grpSpPr>
+        <a:xfrm>
+          <a:off x="0" y="0"/>
+          <a:ext cx="0" cy="0"/>
+          <a:chOff x="0" y="0"/>
+          <a:chExt cx="0" cy="0"/>
+        </a:xfrm>
+      </p:grpSpPr>
+      <p:sp>
+        <p:nvSpPr>
+          <p:cNvPr id="2" name="Text 0"/>
+          <p:cNvSpPr/>
+          <p:nvPr/>
+        </p:nvSpPr>
+        <p:spPr>
+          <a:xfrm>
+            <a:off x="0" y="0"/>
+            <a:ext cx="9144000" cy="101501"/>
+          </a:xfrm>
+          <a:prstGeom prst="rect">
+            <a:avLst/>
+          </a:prstGeom>
+          <a:solidFill>
+            <a:srgbClr val="277884"/>
+          </a:solidFill>
+          <a:ln/>
+        </p:spPr>
+        <p:txBody>
+          <a:bodyPr wrap="square" rtlCol="0" anchor="ctr"/>
+          <a:lstStyle/>
+          <a:p>
+            <a:pPr indent="0" marL="0">
+              <a:buNone/>
+            </a:pPr>
+            <a:endParaRPr lang="en-US" dirty="0"/>
+          </a:p>
+        </p:txBody>
+      </p:sp>
+      <p:sp>
+        <p:nvSpPr>
+          <p:cNvPr id="3" name="Text 1"/>
+          <p:cNvSpPr/>
+          <p:nvPr/>
+        </p:nvSpPr>
+        <p:spPr>
+          <a:xfrm>
+            <a:off x="406301" y="457051"/>
+            <a:ext cx="8498026" cy="274290"/>
+          </a:xfrm>
+          <a:prstGeom prst="rect">
+            <a:avLst/>
+          </a:prstGeom>
+          <a:noFill/>
+          <a:ln/>
+        </p:spPr>
+        <p:txBody>
+          <a:bodyPr wrap="square" lIns="0" tIns="0" rIns="0" bIns="0" rtlCol="0" anchor="t"/>
+          <a:lstStyle/>
+          <a:p>
+            <a:pPr algn="l" indent="0" marL="0">
+              <a:lnSpc>
+                <a:spcPts val="2160"/>
+              </a:lnSpc>
+              <a:spcBef>
+                <a:spcPts val="600"/>
+              </a:spcBef>
+              <a:spcAft>
+                <a:spcPts val="800"/>
+              </a:spcAft>
+              <a:buNone/>
+            </a:pPr>
+            <a:r>
+              <a:rPr lang="en-US" sz="1800" b="1" dirty="0">
+                <a:solidFill>
+                  <a:srgbClr val="FE4447"/>
+                </a:solidFill>
+                <a:latin typeface="Georgia" pitchFamily="34" charset="0"/>
+                <a:ea typeface="Georgia" pitchFamily="34" charset="-122"/>
+                <a:cs typeface="Georgia" pitchFamily="34" charset="-120"/>
+              </a:rPr>
+              <a:t>Differentiation</a:t>
+            </a:r>
+            <a:endParaRPr lang="en-US" sz="1800" dirty="0"/>
+          </a:p>
+        </p:txBody>
+      </p:sp>
+      <p:sp>
+        <p:nvSpPr>
+          <p:cNvPr id="4" name="Text 2"/>
+          <p:cNvSpPr/>
+          <p:nvPr/>
+        </p:nvSpPr>
+        <p:spPr>
+          <a:xfrm>
+            <a:off x="634901" y="883593"/>
+            <a:ext cx="8102798" cy="525661"/>
+          </a:xfrm>
+          <a:prstGeom prst="rect">
+            <a:avLst/>
+          </a:prstGeom>
+          <a:noFill/>
+          <a:ln/>
+        </p:spPr>
+        <p:txBody>
+          <a:bodyPr wrap="square" lIns="0" tIns="0" rIns="0" bIns="0" rtlCol="0" anchor="t"/>
+          <a:lstStyle/>
+          <a:p>
+            <a:pPr algn="l" marL="342900" indent="-342900">
+              <a:lnSpc>
+                <a:spcPts val="1620"/>
+              </a:lnSpc>
+              <a:spcAft>
+                <a:spcPts val="300"/>
+              </a:spcAft>
+              <a:buSzPct val="100000"/>
+              <a:buChar char="•"/>
+            </a:pPr>
+            <a:r>
+              <a:rPr lang="en-US" sz="1200" b="1" dirty="0">
+                <a:solidFill>
+                  <a:srgbClr val="1C2833"/>
+                </a:solidFill>
+                <a:latin typeface="Arial" pitchFamily="34" charset="0"/>
+                <a:ea typeface="Arial" pitchFamily="34" charset="-122"/>
+                <a:cs typeface="Arial" pitchFamily="34" charset="-120"/>
+              </a:rPr>
+              <a:t>Tier up:</a:t>
+            </a:r>
+            <a:pPr algn="l" indent="0" marL="0">
+              <a:lnSpc>
+                <a:spcPts val="1620"/>
+              </a:lnSpc>
+              <a:spcAft>
+                <a:spcPts val="300"/>
+              </a:spcAft>
+              <a:buNone/>
+            </a:pPr>
+            <a:r>
+              <a:rPr lang="en-US" sz="1200" dirty="0">
+                <a:solidFill>
+                  <a:srgbClr val="1C2833"/>
+                </a:solidFill>
+                <a:latin typeface="Arial" pitchFamily="34" charset="0"/>
+                <a:ea typeface="Arial" pitchFamily="34" charset="-122"/>
+                <a:cs typeface="Arial" pitchFamily="34" charset="-120"/>
+              </a:rPr>
+              <a:t> Also design a "weekend" version + a "school holiday" version.</a:t>
+            </a:r>
+            <a:endParaRPr lang="en-US" sz="1200" dirty="0"/>
+          </a:p>
+          <a:p>
+            <a:pPr algn="l" marL="342900" indent="-342900">
+              <a:lnSpc>
+                <a:spcPts val="1620"/>
+              </a:lnSpc>
+              <a:spcAft>
+                <a:spcPts val="300"/>
+              </a:spcAft>
+              <a:buSzPct val="100000"/>
+              <a:buChar char="•"/>
+            </a:pPr>
+            <a:r>
+              <a:rPr lang="en-US" sz="1200" b="1" dirty="0">
+                <a:solidFill>
+                  <a:srgbClr val="1C2833"/>
+                </a:solidFill>
+                <a:latin typeface="Arial" pitchFamily="34" charset="0"/>
+                <a:ea typeface="Arial" pitchFamily="34" charset="-122"/>
+                <a:cs typeface="Arial" pitchFamily="34" charset="-120"/>
+              </a:rPr>
+              <a:t>Tier down:</a:t>
+            </a:r>
+            <a:pPr algn="l" indent="0" marL="0">
+              <a:lnSpc>
+                <a:spcPts val="1620"/>
+              </a:lnSpc>
+              <a:spcAft>
+                <a:spcPts val="300"/>
+              </a:spcAft>
+              <a:buNone/>
+            </a:pPr>
+            <a:r>
+              <a:rPr lang="en-US" sz="1200" dirty="0">
+                <a:solidFill>
+                  <a:srgbClr val="1C2833"/>
+                </a:solidFill>
+                <a:latin typeface="Arial" pitchFamily="34" charset="0"/>
+                <a:ea typeface="Arial" pitchFamily="34" charset="-122"/>
+                <a:cs typeface="Arial" pitchFamily="34" charset="-120"/>
+              </a:rPr>
+              <a:t> Pick 3 specific changes (not a full overhaul).</a:t>
+            </a:r>
+            <a:endParaRPr lang="en-US" sz="1200" dirty="0"/>
+          </a:p>
+        </p:txBody>
+      </p:sp>
+      <p:sp>
+        <p:nvSpPr>
+          <p:cNvPr id="5" name="Text 3"/>
+          <p:cNvSpPr/>
+          <p:nvPr/>
+        </p:nvSpPr>
+        <p:spPr>
+          <a:xfrm>
+            <a:off x="406301" y="4434929"/>
+            <a:ext cx="8498026" cy="213271"/>
+          </a:xfrm>
+          <a:prstGeom prst="rect">
+            <a:avLst/>
+          </a:prstGeom>
+          <a:noFill/>
+          <a:ln/>
+        </p:spPr>
+        <p:txBody>
+          <a:bodyPr wrap="square" lIns="0" tIns="0" rIns="0" bIns="0" rtlCol="0" anchor="t"/>
+          <a:lstStyle/>
+          <a:p>
+            <a:pPr algn="l" indent="0" marL="0">
+              <a:lnSpc>
+                <a:spcPts val="1680"/>
+              </a:lnSpc>
+              <a:spcBef>
+                <a:spcPts val="300"/>
+              </a:spcBef>
+              <a:spcAft>
+                <a:spcPts val="300"/>
+              </a:spcAft>
+              <a:buNone/>
+            </a:pPr>
+            <a:r>
+              <a:rPr lang="en-US" sz="1200" dirty="0">
+                <a:solidFill>
+                  <a:srgbClr val="1C2833"/>
+                </a:solidFill>
+                <a:latin typeface="Arial" pitchFamily="34" charset="0"/>
+                <a:ea typeface="Arial" pitchFamily="34" charset="-122"/>
+                <a:cs typeface="Arial" pitchFamily="34" charset="-120"/>
+              </a:rPr>
+              <a:t>Middle ·  · IKS Curriculum</a:t>
+            </a:r>
+            <a:endParaRPr lang="en-US" sz="1200" dirty="0"/>
+          </a:p>
+        </p:txBody>
+      </p:sp>
+    </p:spTree>
+  </p:cSld>
+  <p:clrMapOvr>
+    <a:masterClrMapping/>
+  </p:clrMapOvr>
+</p:sld>
+</file>
+
+<file path=ppt/slides/slide12.xml><?xml version="1.0" encoding="utf-8"?>
+<p:sld xmlns:a="http://schemas.openxmlformats.org/drawingml/2006/main" xmlns:r="http://schemas.openxmlformats.org/officeDocument/2006/relationships" xmlns:p="http://schemas.openxmlformats.org/presentationml/2006/main">
+  <p:cSld name="Slide 12">
+    <p:bg>
+      <p:bgPr>
+        <a:solidFill>
+          <a:srgbClr val="FFFFFF"/>
+        </a:solidFill>
+      </p:bgPr>
+    </p:bg>
+    <p:spTree>
+      <p:nvGrpSpPr>
+        <p:cNvPr id="1" name=""/>
+        <p:cNvGrpSpPr/>
+        <p:nvPr/>
+      </p:nvGrpSpPr>
+      <p:grpSpPr>
+        <a:xfrm>
+          <a:off x="0" y="0"/>
+          <a:ext cx="0" cy="0"/>
+          <a:chOff x="0" y="0"/>
+          <a:chExt cx="0" cy="0"/>
+        </a:xfrm>
+      </p:grpSpPr>
+      <p:sp>
+        <p:nvSpPr>
+          <p:cNvPr id="2" name="Text 0"/>
+          <p:cNvSpPr/>
+          <p:nvPr/>
+        </p:nvSpPr>
+        <p:spPr>
+          <a:xfrm>
+            <a:off x="0" y="0"/>
+            <a:ext cx="9144000" cy="101501"/>
+          </a:xfrm>
+          <a:prstGeom prst="rect">
+            <a:avLst/>
+          </a:prstGeom>
+          <a:solidFill>
+            <a:srgbClr val="277884"/>
+          </a:solidFill>
+          <a:ln/>
+        </p:spPr>
+        <p:txBody>
+          <a:bodyPr wrap="square" rtlCol="0" anchor="ctr"/>
+          <a:lstStyle/>
+          <a:p>
+            <a:pPr indent="0" marL="0">
+              <a:buNone/>
+            </a:pPr>
+            <a:endParaRPr lang="en-US" dirty="0"/>
+          </a:p>
+        </p:txBody>
+      </p:sp>
+      <p:sp>
+        <p:nvSpPr>
+          <p:cNvPr id="3" name="Text 1"/>
+          <p:cNvSpPr/>
+          <p:nvPr/>
+        </p:nvSpPr>
+        <p:spPr>
+          <a:xfrm>
+            <a:off x="406301" y="457051"/>
+            <a:ext cx="8498026" cy="274290"/>
+          </a:xfrm>
+          <a:prstGeom prst="rect">
+            <a:avLst/>
+          </a:prstGeom>
+          <a:noFill/>
+          <a:ln/>
+        </p:spPr>
+        <p:txBody>
+          <a:bodyPr wrap="square" lIns="0" tIns="0" rIns="0" bIns="0" rtlCol="0" anchor="t"/>
+          <a:lstStyle/>
+          <a:p>
+            <a:pPr algn="l" indent="0" marL="0">
+              <a:lnSpc>
+                <a:spcPts val="2160"/>
+              </a:lnSpc>
+              <a:spcBef>
+                <a:spcPts val="600"/>
+              </a:spcBef>
+              <a:spcAft>
+                <a:spcPts val="800"/>
+              </a:spcAft>
+              <a:buNone/>
+            </a:pPr>
+            <a:r>
+              <a:rPr lang="en-US" sz="1800" b="1" dirty="0">
+                <a:solidFill>
+                  <a:srgbClr val="FE4447"/>
+                </a:solidFill>
+                <a:latin typeface="Georgia" pitchFamily="34" charset="0"/>
+                <a:ea typeface="Georgia" pitchFamily="34" charset="-122"/>
+                <a:cs typeface="Georgia" pitchFamily="34" charset="-120"/>
+              </a:rPr>
+              <a:t>Teacher notes</a:t>
+            </a:r>
+            <a:endParaRPr lang="en-US" sz="1800" dirty="0"/>
+          </a:p>
+        </p:txBody>
+      </p:sp>
+      <p:sp>
+        <p:nvSpPr>
+          <p:cNvPr id="4" name="Text 2"/>
+          <p:cNvSpPr/>
+          <p:nvPr/>
+        </p:nvSpPr>
+        <p:spPr>
+          <a:xfrm>
+            <a:off x="634901" y="883593"/>
+            <a:ext cx="8102798" cy="525661"/>
+          </a:xfrm>
+          <a:prstGeom prst="rect">
+            <a:avLst/>
+          </a:prstGeom>
+          <a:noFill/>
+          <a:ln/>
+        </p:spPr>
+        <p:txBody>
+          <a:bodyPr wrap="square" lIns="0" tIns="0" rIns="0" bIns="0" rtlCol="0" anchor="t"/>
+          <a:lstStyle/>
+          <a:p>
+            <a:pPr algn="l" marL="342900" indent="-342900">
+              <a:lnSpc>
+                <a:spcPts val="1620"/>
+              </a:lnSpc>
+              <a:spcAft>
+                <a:spcPts val="300"/>
+              </a:spcAft>
+              <a:buSzPct val="100000"/>
+              <a:buChar char="•"/>
+            </a:pPr>
+            <a:r>
+              <a:rPr lang="en-US" sz="1200" dirty="0">
+                <a:solidFill>
+                  <a:srgbClr val="1C2833"/>
+                </a:solidFill>
+                <a:latin typeface="Arial" pitchFamily="34" charset="0"/>
+                <a:ea typeface="Arial" pitchFamily="34" charset="-122"/>
+                <a:cs typeface="Arial" pitchFamily="34" charset="-120"/>
+              </a:rPr>
+              <a:t>Realism is the #1 thing. A dinacharya that requires getting up at 4am won't be followed.</a:t>
+            </a:r>
+            <a:endParaRPr lang="en-US" sz="1200" dirty="0"/>
+          </a:p>
+          <a:p>
+            <a:pPr algn="l" marL="342900" indent="-342900">
+              <a:lnSpc>
+                <a:spcPts val="1620"/>
+              </a:lnSpc>
+              <a:spcAft>
+                <a:spcPts val="300"/>
+              </a:spcAft>
+              <a:buSzPct val="100000"/>
+              <a:buChar char="•"/>
+            </a:pPr>
+            <a:r>
+              <a:rPr lang="en-US" sz="1200" dirty="0">
+                <a:solidFill>
+                  <a:srgbClr val="1C2833"/>
+                </a:solidFill>
+                <a:latin typeface="Arial" pitchFamily="34" charset="0"/>
+                <a:ea typeface="Arial" pitchFamily="34" charset="-122"/>
+                <a:cs typeface="Arial" pitchFamily="34" charset="-120"/>
+              </a:rPr>
+              <a:t>Some students may push back on family meal times. Don't override the family; suggest small adjustments only.</a:t>
+            </a:r>
+            <a:endParaRPr lang="en-US" sz="1200" dirty="0"/>
+          </a:p>
+        </p:txBody>
+      </p:sp>
+      <p:sp>
+        <p:nvSpPr>
+          <p:cNvPr id="5" name="Text 3"/>
           <p:cNvSpPr/>
           <p:nvPr/>
         </p:nvSpPr>
@@ -2027,7 +2898,7 @@
                 <a:ea typeface="Georgia" pitchFamily="34" charset="-122"/>
                 <a:cs typeface="Georgia" pitchFamily="34" charset="-120"/>
               </a:rPr>
-              <a:t>Materials</a:t>
+              <a:t>Learning objective</a:t>
             </a:r>
             <a:endParaRPr lang="en-US" sz="1800" dirty="0"/>
           </a:p>
@@ -2075,7 +2946,7 @@
                 <a:ea typeface="Arial" pitchFamily="34" charset="-122"/>
                 <a:cs typeface="Arial" pitchFamily="34" charset="-120"/>
               </a:rPr>
-              <a:t>– Project brief + rubric – Worksheet template</a:t>
+              <a:t>Each student drafts a 7-day dinacharya for themselves, with each practice paired to its Ayurvedic principle.</a:t>
             </a:r>
             <a:endParaRPr lang="en-US" sz="1200" dirty="0"/>
           </a:p>
@@ -2233,7 +3104,7 @@
                 <a:ea typeface="Georgia" pitchFamily="34" charset="-122"/>
                 <a:cs typeface="Georgia" pitchFamily="34" charset="-120"/>
               </a:rPr>
-              <a:t>Flow</a:t>
+              <a:t>Materials</a:t>
             </a:r>
             <a:endParaRPr lang="en-US" sz="1800" dirty="0"/>
           </a:p>
@@ -2242,6 +3113,76 @@
       <p:sp>
         <p:nvSpPr>
           <p:cNvPr id="4" name="Text 2"/>
+          <p:cNvSpPr/>
+          <p:nvPr/>
+        </p:nvSpPr>
+        <p:spPr>
+          <a:xfrm>
+            <a:off x="634901" y="883593"/>
+            <a:ext cx="8102798" cy="525661"/>
+          </a:xfrm>
+          <a:prstGeom prst="rect">
+            <a:avLst/>
+          </a:prstGeom>
+          <a:noFill/>
+          <a:ln/>
+        </p:spPr>
+        <p:txBody>
+          <a:bodyPr wrap="square" lIns="0" tIns="0" rIns="0" bIns="0" rtlCol="0" anchor="t"/>
+          <a:lstStyle/>
+          <a:p>
+            <a:pPr algn="l" marL="342900" indent="-342900">
+              <a:lnSpc>
+                <a:spcPts val="1620"/>
+              </a:lnSpc>
+              <a:spcAft>
+                <a:spcPts val="300"/>
+              </a:spcAft>
+              <a:buSzPct val="100000"/>
+              <a:buChar char="•"/>
+            </a:pPr>
+            <a:r>
+              <a:rPr lang="en-US" sz="1200" dirty="0">
+                <a:solidFill>
+                  <a:srgbClr val="1C2833"/>
+                </a:solidFill>
+                <a:latin typeface="Arial" pitchFamily="34" charset="0"/>
+                <a:ea typeface="Arial" pitchFamily="34" charset="-122"/>
+                <a:cs typeface="Arial" pitchFamily="34" charset="-120"/>
+              </a:rPr>
+              <a:t>Project brief + rubric</a:t>
+            </a:r>
+            <a:endParaRPr lang="en-US" sz="1200" dirty="0"/>
+          </a:p>
+          <a:p>
+            <a:pPr algn="l" marL="342900" indent="-342900">
+              <a:lnSpc>
+                <a:spcPts val="1620"/>
+              </a:lnSpc>
+              <a:spcAft>
+                <a:spcPts val="300"/>
+              </a:spcAft>
+              <a:buSzPct val="100000"/>
+              <a:buChar char="•"/>
+            </a:pPr>
+            <a:r>
+              <a:rPr lang="en-US" sz="1200" dirty="0">
+                <a:solidFill>
+                  <a:srgbClr val="1C2833"/>
+                </a:solidFill>
+                <a:latin typeface="Arial" pitchFamily="34" charset="0"/>
+                <a:ea typeface="Arial" pitchFamily="34" charset="-122"/>
+                <a:cs typeface="Arial" pitchFamily="34" charset="-120"/>
+              </a:rPr>
+              <a:t>Worksheet template</a:t>
+            </a:r>
+            <a:endParaRPr lang="en-US" sz="1200" dirty="0"/>
+          </a:p>
+        </p:txBody>
+      </p:sp>
+      <p:sp>
+        <p:nvSpPr>
+          <p:cNvPr id="5" name="Text 3"/>
           <p:cNvSpPr/>
           <p:nvPr/>
         </p:nvSpPr>
@@ -2391,7 +3332,7 @@
                 <a:ea typeface="Georgia" pitchFamily="34" charset="-122"/>
                 <a:cs typeface="Georgia" pitchFamily="34" charset="-120"/>
               </a:rPr>
-              <a:t>Warm-up (5 min)</a:t>
+              <a:t>Flow</a:t>
             </a:r>
             <a:endParaRPr lang="en-US" sz="1800" dirty="0"/>
           </a:p>
@@ -2400,54 +3341,6 @@
       <p:sp>
         <p:nvSpPr>
           <p:cNvPr id="4" name="Text 2"/>
-          <p:cNvSpPr/>
-          <p:nvPr/>
-        </p:nvSpPr>
-        <p:spPr>
-          <a:xfrm>
-            <a:off x="406301" y="870942"/>
-            <a:ext cx="8498026" cy="213271"/>
-          </a:xfrm>
-          <a:prstGeom prst="rect">
-            <a:avLst/>
-          </a:prstGeom>
-          <a:noFill/>
-          <a:ln/>
-        </p:spPr>
-        <p:txBody>
-          <a:bodyPr wrap="square" lIns="0" tIns="0" rIns="0" bIns="0" rtlCol="0" anchor="t"/>
-          <a:lstStyle/>
-          <a:p>
-            <a:pPr algn="l" indent="0" marL="0">
-              <a:lnSpc>
-                <a:spcPts val="1680"/>
-              </a:lnSpc>
-              <a:spcBef>
-                <a:spcPts val="300"/>
-              </a:spcBef>
-              <a:spcAft>
-                <a:spcPts val="300"/>
-              </a:spcAft>
-              <a:buNone/>
-            </a:pPr>
-            <a:r>
-              <a:rPr lang="en-US" sz="1200" dirty="0">
-                <a:solidFill>
-                  <a:srgbClr val="1C2833"/>
-                </a:solidFill>
-                <a:latin typeface="Arial" pitchFamily="34" charset="0"/>
-                <a:ea typeface="Arial" pitchFamily="34" charset="-122"/>
-                <a:cs typeface="Arial" pitchFamily="34" charset="-120"/>
-              </a:rPr>
-              <a:t>Brief: today is design. Show rubric.</a:t>
-            </a:r>
-            <a:endParaRPr lang="en-US" sz="1200" dirty="0"/>
-          </a:p>
-        </p:txBody>
-      </p:sp>
-      <p:sp>
-        <p:nvSpPr>
-          <p:cNvPr id="5" name="Text 3"/>
           <p:cNvSpPr/>
           <p:nvPr/>
         </p:nvSpPr>
@@ -2597,7 +3490,7 @@
                 <a:ea typeface="Georgia" pitchFamily="34" charset="-122"/>
                 <a:cs typeface="Georgia" pitchFamily="34" charset="-120"/>
               </a:rPr>
-              <a:t>Core (35 min) — Design sprints</a:t>
+              <a:t>Warm-up (5 min)</a:t>
             </a:r>
             <a:endParaRPr lang="en-US" sz="1800" dirty="0"/>
           </a:p>
@@ -2612,7 +3505,7 @@
         <p:spPr>
           <a:xfrm>
             <a:off x="406301" y="870942"/>
-            <a:ext cx="8498026" cy="426541"/>
+            <a:ext cx="8498026" cy="213271"/>
           </a:xfrm>
           <a:prstGeom prst="rect">
             <a:avLst/>
@@ -2637,7 +3530,7 @@
               <a:buNone/>
             </a:pPr>
             <a:r>
-              <a:rPr lang="en-US" sz="1200" b="1" dirty="0">
+              <a:rPr lang="en-US" sz="1200" dirty="0">
                 <a:solidFill>
                   <a:srgbClr val="1C2833"/>
                 </a:solidFill>
@@ -2645,30 +3538,7 @@
                 <a:ea typeface="Arial" pitchFamily="34" charset="-122"/>
                 <a:cs typeface="Arial" pitchFamily="34" charset="-120"/>
               </a:rPr>
-              <a:t>Sprint 1 (10 min) — Wake-to-school routine.</a:t>
-            </a:r>
-            <a:pPr algn="l" indent="0" marL="0">
-              <a:lnSpc>
-                <a:spcPts val="1680"/>
-              </a:lnSpc>
-              <a:spcBef>
-                <a:spcPts val="300"/>
-              </a:spcBef>
-              <a:spcAft>
-                <a:spcPts val="300"/>
-              </a:spcAft>
-              <a:buNone/>
-            </a:pPr>
-            <a:r>
-              <a:rPr lang="en-US" sz="1200" dirty="0">
-                <a:solidFill>
-                  <a:srgbClr val="1C2833"/>
-                </a:solidFill>
-                <a:latin typeface="Arial" pitchFamily="34" charset="0"/>
-                <a:ea typeface="Arial" pitchFamily="34" charset="-122"/>
-                <a:cs typeface="Arial" pitchFamily="34" charset="-120"/>
-              </a:rPr>
-              <a:t> – Wake time? – First glass of water? – Oral hygiene? – Exercise? – Breakfast?</a:t>
+              <a:t>Brief: today is design. Show rubric.</a:t>
             </a:r>
             <a:endParaRPr lang="en-US" sz="1200" dirty="0"/>
           </a:p>
@@ -2677,267 +3547,6 @@
       <p:sp>
         <p:nvSpPr>
           <p:cNvPr id="5" name="Text 3"/>
-          <p:cNvSpPr/>
-          <p:nvPr/>
-        </p:nvSpPr>
-        <p:spPr>
-          <a:xfrm>
-            <a:off x="406301" y="1373684"/>
-            <a:ext cx="8498026" cy="213271"/>
-          </a:xfrm>
-          <a:prstGeom prst="rect">
-            <a:avLst/>
-          </a:prstGeom>
-          <a:noFill/>
-          <a:ln/>
-        </p:spPr>
-        <p:txBody>
-          <a:bodyPr wrap="square" lIns="0" tIns="0" rIns="0" bIns="0" rtlCol="0" anchor="t"/>
-          <a:lstStyle/>
-          <a:p>
-            <a:pPr algn="l" indent="0" marL="0">
-              <a:lnSpc>
-                <a:spcPts val="1680"/>
-              </a:lnSpc>
-              <a:spcBef>
-                <a:spcPts val="300"/>
-              </a:spcBef>
-              <a:spcAft>
-                <a:spcPts val="300"/>
-              </a:spcAft>
-              <a:buNone/>
-            </a:pPr>
-            <a:r>
-              <a:rPr lang="en-US" sz="1200" dirty="0">
-                <a:solidFill>
-                  <a:srgbClr val="1C2833"/>
-                </a:solidFill>
-                <a:latin typeface="Arial" pitchFamily="34" charset="0"/>
-                <a:ea typeface="Arial" pitchFamily="34" charset="-122"/>
-                <a:cs typeface="Arial" pitchFamily="34" charset="-120"/>
-              </a:rPr>
-              <a:t>Each item paired with its Ayurvedic principle.</a:t>
-            </a:r>
-            <a:endParaRPr lang="en-US" sz="1200" dirty="0"/>
-          </a:p>
-        </p:txBody>
-      </p:sp>
-      <p:sp>
-        <p:nvSpPr>
-          <p:cNvPr id="6" name="Text 4"/>
-          <p:cNvSpPr/>
-          <p:nvPr/>
-        </p:nvSpPr>
-        <p:spPr>
-          <a:xfrm>
-            <a:off x="406301" y="1663154"/>
-            <a:ext cx="8498026" cy="213271"/>
-          </a:xfrm>
-          <a:prstGeom prst="rect">
-            <a:avLst/>
-          </a:prstGeom>
-          <a:noFill/>
-          <a:ln/>
-        </p:spPr>
-        <p:txBody>
-          <a:bodyPr wrap="square" lIns="0" tIns="0" rIns="0" bIns="0" rtlCol="0" anchor="t"/>
-          <a:lstStyle/>
-          <a:p>
-            <a:pPr algn="l" indent="0" marL="0">
-              <a:lnSpc>
-                <a:spcPts val="1680"/>
-              </a:lnSpc>
-              <a:spcBef>
-                <a:spcPts val="300"/>
-              </a:spcBef>
-              <a:spcAft>
-                <a:spcPts val="300"/>
-              </a:spcAft>
-              <a:buNone/>
-            </a:pPr>
-            <a:r>
-              <a:rPr lang="en-US" sz="1200" b="1" dirty="0">
-                <a:solidFill>
-                  <a:srgbClr val="1C2833"/>
-                </a:solidFill>
-                <a:latin typeface="Arial" pitchFamily="34" charset="0"/>
-                <a:ea typeface="Arial" pitchFamily="34" charset="-122"/>
-                <a:cs typeface="Arial" pitchFamily="34" charset="-120"/>
-              </a:rPr>
-              <a:t>Sprint 2 (10 min) — Midday routine.</a:t>
-            </a:r>
-            <a:pPr algn="l" indent="0" marL="0">
-              <a:lnSpc>
-                <a:spcPts val="1680"/>
-              </a:lnSpc>
-              <a:spcBef>
-                <a:spcPts val="300"/>
-              </a:spcBef>
-              <a:spcAft>
-                <a:spcPts val="300"/>
-              </a:spcAft>
-              <a:buNone/>
-            </a:pPr>
-            <a:r>
-              <a:rPr lang="en-US" sz="1200" dirty="0">
-                <a:solidFill>
-                  <a:srgbClr val="1C2833"/>
-                </a:solidFill>
-                <a:latin typeface="Arial" pitchFamily="34" charset="0"/>
-                <a:ea typeface="Arial" pitchFamily="34" charset="-122"/>
-                <a:cs typeface="Arial" pitchFamily="34" charset="-120"/>
-              </a:rPr>
-              <a:t> – Largest meal timing? – Activities during Pitta hours (10am–2pm)?</a:t>
-            </a:r>
-            <a:endParaRPr lang="en-US" sz="1200" dirty="0"/>
-          </a:p>
-        </p:txBody>
-      </p:sp>
-      <p:sp>
-        <p:nvSpPr>
-          <p:cNvPr id="7" name="Text 5"/>
-          <p:cNvSpPr/>
-          <p:nvPr/>
-        </p:nvSpPr>
-        <p:spPr>
-          <a:xfrm>
-            <a:off x="406301" y="1952625"/>
-            <a:ext cx="8498026" cy="213271"/>
-          </a:xfrm>
-          <a:prstGeom prst="rect">
-            <a:avLst/>
-          </a:prstGeom>
-          <a:noFill/>
-          <a:ln/>
-        </p:spPr>
-        <p:txBody>
-          <a:bodyPr wrap="square" lIns="0" tIns="0" rIns="0" bIns="0" rtlCol="0" anchor="t"/>
-          <a:lstStyle/>
-          <a:p>
-            <a:pPr algn="l" indent="0" marL="0">
-              <a:lnSpc>
-                <a:spcPts val="1680"/>
-              </a:lnSpc>
-              <a:spcBef>
-                <a:spcPts val="300"/>
-              </a:spcBef>
-              <a:spcAft>
-                <a:spcPts val="300"/>
-              </a:spcAft>
-              <a:buNone/>
-            </a:pPr>
-            <a:r>
-              <a:rPr lang="en-US" sz="1200" b="1" dirty="0">
-                <a:solidFill>
-                  <a:srgbClr val="1C2833"/>
-                </a:solidFill>
-                <a:latin typeface="Arial" pitchFamily="34" charset="0"/>
-                <a:ea typeface="Arial" pitchFamily="34" charset="-122"/>
-                <a:cs typeface="Arial" pitchFamily="34" charset="-120"/>
-              </a:rPr>
-              <a:t>Sprint 3 (10 min) — Evening + sleep.</a:t>
-            </a:r>
-            <a:pPr algn="l" indent="0" marL="0">
-              <a:lnSpc>
-                <a:spcPts val="1680"/>
-              </a:lnSpc>
-              <a:spcBef>
-                <a:spcPts val="300"/>
-              </a:spcBef>
-              <a:spcAft>
-                <a:spcPts val="300"/>
-              </a:spcAft>
-              <a:buNone/>
-            </a:pPr>
-            <a:r>
-              <a:rPr lang="en-US" sz="1200" dirty="0">
-                <a:solidFill>
-                  <a:srgbClr val="1C2833"/>
-                </a:solidFill>
-                <a:latin typeface="Arial" pitchFamily="34" charset="0"/>
-                <a:ea typeface="Arial" pitchFamily="34" charset="-122"/>
-                <a:cs typeface="Arial" pitchFamily="34" charset="-120"/>
-              </a:rPr>
-              <a:t> – Dinner timing? – Pre-bed wind-down? – Sleep target?</a:t>
-            </a:r>
-            <a:endParaRPr lang="en-US" sz="1200" dirty="0"/>
-          </a:p>
-        </p:txBody>
-      </p:sp>
-      <p:sp>
-        <p:nvSpPr>
-          <p:cNvPr id="8" name="Text 6"/>
-          <p:cNvSpPr/>
-          <p:nvPr/>
-        </p:nvSpPr>
-        <p:spPr>
-          <a:xfrm>
-            <a:off x="406301" y="2242096"/>
-            <a:ext cx="8498026" cy="426541"/>
-          </a:xfrm>
-          <a:prstGeom prst="rect">
-            <a:avLst/>
-          </a:prstGeom>
-          <a:noFill/>
-          <a:ln/>
-        </p:spPr>
-        <p:txBody>
-          <a:bodyPr wrap="square" lIns="0" tIns="0" rIns="0" bIns="0" rtlCol="0" anchor="t"/>
-          <a:lstStyle/>
-          <a:p>
-            <a:pPr algn="l" indent="0" marL="0">
-              <a:lnSpc>
-                <a:spcPts val="1680"/>
-              </a:lnSpc>
-              <a:spcBef>
-                <a:spcPts val="300"/>
-              </a:spcBef>
-              <a:spcAft>
-                <a:spcPts val="300"/>
-              </a:spcAft>
-              <a:buNone/>
-            </a:pPr>
-            <a:r>
-              <a:rPr lang="en-US" sz="1200" b="1" dirty="0">
-                <a:solidFill>
-                  <a:srgbClr val="1C2833"/>
-                </a:solidFill>
-                <a:latin typeface="Arial" pitchFamily="34" charset="0"/>
-                <a:ea typeface="Arial" pitchFamily="34" charset="-122"/>
-                <a:cs typeface="Arial" pitchFamily="34" charset="-120"/>
-              </a:rPr>
-              <a:t>Sprint 4 (5 min) — Realism check.</a:t>
-            </a:r>
-            <a:pPr algn="l" indent="0" marL="0">
-              <a:lnSpc>
-                <a:spcPts val="1680"/>
-              </a:lnSpc>
-              <a:spcBef>
-                <a:spcPts val="300"/>
-              </a:spcBef>
-              <a:spcAft>
-                <a:spcPts val="300"/>
-              </a:spcAft>
-              <a:buNone/>
-            </a:pPr>
-            <a:r>
-              <a:rPr lang="en-US" sz="1200" dirty="0">
-                <a:solidFill>
-                  <a:srgbClr val="1C2833"/>
-                </a:solidFill>
-                <a:latin typeface="Arial" pitchFamily="34" charset="0"/>
-                <a:ea typeface="Arial" pitchFamily="34" charset="-122"/>
-                <a:cs typeface="Arial" pitchFamily="34" charset="-120"/>
-              </a:rPr>
-              <a:t> – Are these times achievable for your actual school week? – If not, what's the MINIMUM viable change?</a:t>
-            </a:r>
-            <a:endParaRPr lang="en-US" sz="1200" dirty="0"/>
-          </a:p>
-        </p:txBody>
-      </p:sp>
-      <p:sp>
-        <p:nvSpPr>
-          <p:cNvPr id="9" name="Text 7"/>
           <p:cNvSpPr/>
           <p:nvPr/>
         </p:nvSpPr>
@@ -3087,7 +3696,7 @@
                 <a:ea typeface="Georgia" pitchFamily="34" charset="-122"/>
                 <a:cs typeface="Georgia" pitchFamily="34" charset="-120"/>
               </a:rPr>
-              <a:t>Wrap-up (5 min)</a:t>
+              <a:t>Core (35 min) — Design sprints</a:t>
             </a:r>
             <a:endParaRPr lang="en-US" sz="1800" dirty="0"/>
           </a:p>
@@ -3127,7 +3736,7 @@
               <a:buNone/>
             </a:pPr>
             <a:r>
-              <a:rPr lang="en-US" sz="1200" dirty="0">
+              <a:rPr lang="en-US" sz="1200" b="1" dirty="0">
                 <a:solidFill>
                   <a:srgbClr val="1C2833"/>
                 </a:solidFill>
@@ -3135,7 +3744,7 @@
                 <a:ea typeface="Arial" pitchFamily="34" charset="-122"/>
                 <a:cs typeface="Arial" pitchFamily="34" charset="-120"/>
               </a:rPr>
-              <a:t>– Plan submitted at door.</a:t>
+              <a:t>Sprint 1 (10 min) — Wake-to-school routine.</a:t>
             </a:r>
             <a:endParaRPr lang="en-US" sz="1200" dirty="0"/>
           </a:p>
@@ -3144,6 +3753,196 @@
       <p:sp>
         <p:nvSpPr>
           <p:cNvPr id="5" name="Text 3"/>
+          <p:cNvSpPr/>
+          <p:nvPr/>
+        </p:nvSpPr>
+        <p:spPr>
+          <a:xfrm>
+            <a:off x="634901" y="1173063"/>
+            <a:ext cx="8102798" cy="1257002"/>
+          </a:xfrm>
+          <a:prstGeom prst="rect">
+            <a:avLst/>
+          </a:prstGeom>
+          <a:noFill/>
+          <a:ln/>
+        </p:spPr>
+        <p:txBody>
+          <a:bodyPr wrap="square" lIns="0" tIns="0" rIns="0" bIns="0" rtlCol="0" anchor="t"/>
+          <a:lstStyle/>
+          <a:p>
+            <a:pPr algn="l" marL="342900" indent="-342900">
+              <a:lnSpc>
+                <a:spcPts val="1620"/>
+              </a:lnSpc>
+              <a:spcAft>
+                <a:spcPts val="300"/>
+              </a:spcAft>
+              <a:buSzPct val="100000"/>
+              <a:buChar char="•"/>
+            </a:pPr>
+            <a:r>
+              <a:rPr lang="en-US" sz="1200" dirty="0">
+                <a:solidFill>
+                  <a:srgbClr val="1C2833"/>
+                </a:solidFill>
+                <a:latin typeface="Arial" pitchFamily="34" charset="0"/>
+                <a:ea typeface="Arial" pitchFamily="34" charset="-122"/>
+                <a:cs typeface="Arial" pitchFamily="34" charset="-120"/>
+              </a:rPr>
+              <a:t>Wake time?</a:t>
+            </a:r>
+            <a:endParaRPr lang="en-US" sz="1200" dirty="0"/>
+          </a:p>
+          <a:p>
+            <a:pPr algn="l" marL="342900" indent="-342900">
+              <a:lnSpc>
+                <a:spcPts val="1620"/>
+              </a:lnSpc>
+              <a:spcAft>
+                <a:spcPts val="300"/>
+              </a:spcAft>
+              <a:buSzPct val="100000"/>
+              <a:buChar char="•"/>
+            </a:pPr>
+            <a:r>
+              <a:rPr lang="en-US" sz="1200" dirty="0">
+                <a:solidFill>
+                  <a:srgbClr val="1C2833"/>
+                </a:solidFill>
+                <a:latin typeface="Arial" pitchFamily="34" charset="0"/>
+                <a:ea typeface="Arial" pitchFamily="34" charset="-122"/>
+                <a:cs typeface="Arial" pitchFamily="34" charset="-120"/>
+              </a:rPr>
+              <a:t>First glass of water?</a:t>
+            </a:r>
+            <a:endParaRPr lang="en-US" sz="1200" dirty="0"/>
+          </a:p>
+          <a:p>
+            <a:pPr algn="l" marL="342900" indent="-342900">
+              <a:lnSpc>
+                <a:spcPts val="1620"/>
+              </a:lnSpc>
+              <a:spcAft>
+                <a:spcPts val="300"/>
+              </a:spcAft>
+              <a:buSzPct val="100000"/>
+              <a:buChar char="•"/>
+            </a:pPr>
+            <a:r>
+              <a:rPr lang="en-US" sz="1200" dirty="0">
+                <a:solidFill>
+                  <a:srgbClr val="1C2833"/>
+                </a:solidFill>
+                <a:latin typeface="Arial" pitchFamily="34" charset="0"/>
+                <a:ea typeface="Arial" pitchFamily="34" charset="-122"/>
+                <a:cs typeface="Arial" pitchFamily="34" charset="-120"/>
+              </a:rPr>
+              <a:t>Oral hygiene?</a:t>
+            </a:r>
+            <a:endParaRPr lang="en-US" sz="1200" dirty="0"/>
+          </a:p>
+          <a:p>
+            <a:pPr algn="l" marL="342900" indent="-342900">
+              <a:lnSpc>
+                <a:spcPts val="1620"/>
+              </a:lnSpc>
+              <a:spcAft>
+                <a:spcPts val="300"/>
+              </a:spcAft>
+              <a:buSzPct val="100000"/>
+              <a:buChar char="•"/>
+            </a:pPr>
+            <a:r>
+              <a:rPr lang="en-US" sz="1200" dirty="0">
+                <a:solidFill>
+                  <a:srgbClr val="1C2833"/>
+                </a:solidFill>
+                <a:latin typeface="Arial" pitchFamily="34" charset="0"/>
+                <a:ea typeface="Arial" pitchFamily="34" charset="-122"/>
+                <a:cs typeface="Arial" pitchFamily="34" charset="-120"/>
+              </a:rPr>
+              <a:t>Exercise?</a:t>
+            </a:r>
+            <a:endParaRPr lang="en-US" sz="1200" dirty="0"/>
+          </a:p>
+          <a:p>
+            <a:pPr algn="l" marL="342900" indent="-342900">
+              <a:lnSpc>
+                <a:spcPts val="1620"/>
+              </a:lnSpc>
+              <a:spcAft>
+                <a:spcPts val="300"/>
+              </a:spcAft>
+              <a:buSzPct val="100000"/>
+              <a:buChar char="•"/>
+            </a:pPr>
+            <a:r>
+              <a:rPr lang="en-US" sz="1200" dirty="0">
+                <a:solidFill>
+                  <a:srgbClr val="1C2833"/>
+                </a:solidFill>
+                <a:latin typeface="Arial" pitchFamily="34" charset="0"/>
+                <a:ea typeface="Arial" pitchFamily="34" charset="-122"/>
+                <a:cs typeface="Arial" pitchFamily="34" charset="-120"/>
+              </a:rPr>
+              <a:t>Breakfast?</a:t>
+            </a:r>
+            <a:endParaRPr lang="en-US" sz="1200" dirty="0"/>
+          </a:p>
+        </p:txBody>
+      </p:sp>
+      <p:sp>
+        <p:nvSpPr>
+          <p:cNvPr id="6" name="Text 4"/>
+          <p:cNvSpPr/>
+          <p:nvPr/>
+        </p:nvSpPr>
+        <p:spPr>
+          <a:xfrm>
+            <a:off x="406301" y="2518916"/>
+            <a:ext cx="8498026" cy="213271"/>
+          </a:xfrm>
+          <a:prstGeom prst="rect">
+            <a:avLst/>
+          </a:prstGeom>
+          <a:noFill/>
+          <a:ln/>
+        </p:spPr>
+        <p:txBody>
+          <a:bodyPr wrap="square" lIns="0" tIns="0" rIns="0" bIns="0" rtlCol="0" anchor="t"/>
+          <a:lstStyle/>
+          <a:p>
+            <a:pPr algn="l" indent="0" marL="0">
+              <a:lnSpc>
+                <a:spcPts val="1680"/>
+              </a:lnSpc>
+              <a:spcBef>
+                <a:spcPts val="300"/>
+              </a:spcBef>
+              <a:spcAft>
+                <a:spcPts val="300"/>
+              </a:spcAft>
+              <a:buNone/>
+            </a:pPr>
+            <a:r>
+              <a:rPr lang="en-US" sz="1200" dirty="0">
+                <a:solidFill>
+                  <a:srgbClr val="1C2833"/>
+                </a:solidFill>
+                <a:latin typeface="Arial" pitchFamily="34" charset="0"/>
+                <a:ea typeface="Arial" pitchFamily="34" charset="-122"/>
+                <a:cs typeface="Arial" pitchFamily="34" charset="-120"/>
+              </a:rPr>
+              <a:t>Each item paired with its Ayurvedic principle.</a:t>
+            </a:r>
+            <a:endParaRPr lang="en-US" sz="1200" dirty="0"/>
+          </a:p>
+        </p:txBody>
+      </p:sp>
+      <p:sp>
+        <p:nvSpPr>
+          <p:cNvPr id="7" name="Text 5"/>
           <p:cNvSpPr/>
           <p:nvPr/>
         </p:nvSpPr>
@@ -3293,7 +4092,7 @@
                 <a:ea typeface="Georgia" pitchFamily="34" charset="-122"/>
                 <a:cs typeface="Georgia" pitchFamily="34" charset="-120"/>
               </a:rPr>
-              <a:t>Homework</a:t>
+              <a:t>Core (35 min) — Design sprints (cont.)</a:t>
             </a:r>
             <a:endParaRPr lang="en-US" sz="1800" dirty="0"/>
           </a:p>
@@ -3333,7 +4132,7 @@
               <a:buNone/>
             </a:pPr>
             <a:r>
-              <a:rPr lang="en-US" sz="1200" dirty="0">
+              <a:rPr lang="en-US" sz="1200" b="1" dirty="0">
                 <a:solidFill>
                   <a:srgbClr val="1C2833"/>
                 </a:solidFill>
@@ -3341,7 +4140,7 @@
                 <a:ea typeface="Arial" pitchFamily="34" charset="-122"/>
                 <a:cs typeface="Arial" pitchFamily="34" charset="-120"/>
               </a:rPr>
-              <a:t>– Try ONE day of your dinacharya tonight + tomorrow morning. Note what worked and what didn't.</a:t>
+              <a:t>Sprint 2 (10 min) — Midday routine.</a:t>
             </a:r>
             <a:endParaRPr lang="en-US" sz="1200" dirty="0"/>
           </a:p>
@@ -3350,6 +4149,218 @@
       <p:sp>
         <p:nvSpPr>
           <p:cNvPr id="5" name="Text 3"/>
+          <p:cNvSpPr/>
+          <p:nvPr/>
+        </p:nvSpPr>
+        <p:spPr>
+          <a:xfrm>
+            <a:off x="634901" y="1173063"/>
+            <a:ext cx="8102798" cy="525661"/>
+          </a:xfrm>
+          <a:prstGeom prst="rect">
+            <a:avLst/>
+          </a:prstGeom>
+          <a:noFill/>
+          <a:ln/>
+        </p:spPr>
+        <p:txBody>
+          <a:bodyPr wrap="square" lIns="0" tIns="0" rIns="0" bIns="0" rtlCol="0" anchor="t"/>
+          <a:lstStyle/>
+          <a:p>
+            <a:pPr algn="l" marL="342900" indent="-342900">
+              <a:lnSpc>
+                <a:spcPts val="1620"/>
+              </a:lnSpc>
+              <a:spcAft>
+                <a:spcPts val="300"/>
+              </a:spcAft>
+              <a:buSzPct val="100000"/>
+              <a:buChar char="•"/>
+            </a:pPr>
+            <a:r>
+              <a:rPr lang="en-US" sz="1200" dirty="0">
+                <a:solidFill>
+                  <a:srgbClr val="1C2833"/>
+                </a:solidFill>
+                <a:latin typeface="Arial" pitchFamily="34" charset="0"/>
+                <a:ea typeface="Arial" pitchFamily="34" charset="-122"/>
+                <a:cs typeface="Arial" pitchFamily="34" charset="-120"/>
+              </a:rPr>
+              <a:t>Largest meal timing?</a:t>
+            </a:r>
+            <a:endParaRPr lang="en-US" sz="1200" dirty="0"/>
+          </a:p>
+          <a:p>
+            <a:pPr algn="l" marL="342900" indent="-342900">
+              <a:lnSpc>
+                <a:spcPts val="1620"/>
+              </a:lnSpc>
+              <a:spcAft>
+                <a:spcPts val="300"/>
+              </a:spcAft>
+              <a:buSzPct val="100000"/>
+              <a:buChar char="•"/>
+            </a:pPr>
+            <a:r>
+              <a:rPr lang="en-US" sz="1200" dirty="0">
+                <a:solidFill>
+                  <a:srgbClr val="1C2833"/>
+                </a:solidFill>
+                <a:latin typeface="Arial" pitchFamily="34" charset="0"/>
+                <a:ea typeface="Arial" pitchFamily="34" charset="-122"/>
+                <a:cs typeface="Arial" pitchFamily="34" charset="-120"/>
+              </a:rPr>
+              <a:t>Activities during Pitta hours (10am–2pm)?</a:t>
+            </a:r>
+            <a:endParaRPr lang="en-US" sz="1200" dirty="0"/>
+          </a:p>
+        </p:txBody>
+      </p:sp>
+      <p:sp>
+        <p:nvSpPr>
+          <p:cNvPr id="6" name="Text 4"/>
+          <p:cNvSpPr/>
+          <p:nvPr/>
+        </p:nvSpPr>
+        <p:spPr>
+          <a:xfrm>
+            <a:off x="406301" y="1787575"/>
+            <a:ext cx="8498026" cy="213271"/>
+          </a:xfrm>
+          <a:prstGeom prst="rect">
+            <a:avLst/>
+          </a:prstGeom>
+          <a:noFill/>
+          <a:ln/>
+        </p:spPr>
+        <p:txBody>
+          <a:bodyPr wrap="square" lIns="0" tIns="0" rIns="0" bIns="0" rtlCol="0" anchor="t"/>
+          <a:lstStyle/>
+          <a:p>
+            <a:pPr algn="l" indent="0" marL="0">
+              <a:lnSpc>
+                <a:spcPts val="1680"/>
+              </a:lnSpc>
+              <a:spcBef>
+                <a:spcPts val="300"/>
+              </a:spcBef>
+              <a:spcAft>
+                <a:spcPts val="300"/>
+              </a:spcAft>
+              <a:buNone/>
+            </a:pPr>
+            <a:r>
+              <a:rPr lang="en-US" sz="1200" b="1" dirty="0">
+                <a:solidFill>
+                  <a:srgbClr val="1C2833"/>
+                </a:solidFill>
+                <a:latin typeface="Arial" pitchFamily="34" charset="0"/>
+                <a:ea typeface="Arial" pitchFamily="34" charset="-122"/>
+                <a:cs typeface="Arial" pitchFamily="34" charset="-120"/>
+              </a:rPr>
+              <a:t>Sprint 3 (10 min) — Evening + sleep.</a:t>
+            </a:r>
+            <a:endParaRPr lang="en-US" sz="1200" dirty="0"/>
+          </a:p>
+        </p:txBody>
+      </p:sp>
+      <p:sp>
+        <p:nvSpPr>
+          <p:cNvPr id="7" name="Text 5"/>
+          <p:cNvSpPr/>
+          <p:nvPr/>
+        </p:nvSpPr>
+        <p:spPr>
+          <a:xfrm>
+            <a:off x="634901" y="2089696"/>
+            <a:ext cx="8102798" cy="769441"/>
+          </a:xfrm>
+          <a:prstGeom prst="rect">
+            <a:avLst/>
+          </a:prstGeom>
+          <a:noFill/>
+          <a:ln/>
+        </p:spPr>
+        <p:txBody>
+          <a:bodyPr wrap="square" lIns="0" tIns="0" rIns="0" bIns="0" rtlCol="0" anchor="t"/>
+          <a:lstStyle/>
+          <a:p>
+            <a:pPr algn="l" marL="342900" indent="-342900">
+              <a:lnSpc>
+                <a:spcPts val="1620"/>
+              </a:lnSpc>
+              <a:spcAft>
+                <a:spcPts val="300"/>
+              </a:spcAft>
+              <a:buSzPct val="100000"/>
+              <a:buChar char="•"/>
+            </a:pPr>
+            <a:r>
+              <a:rPr lang="en-US" sz="1200" dirty="0">
+                <a:solidFill>
+                  <a:srgbClr val="1C2833"/>
+                </a:solidFill>
+                <a:latin typeface="Arial" pitchFamily="34" charset="0"/>
+                <a:ea typeface="Arial" pitchFamily="34" charset="-122"/>
+                <a:cs typeface="Arial" pitchFamily="34" charset="-120"/>
+              </a:rPr>
+              <a:t>Dinner timing?</a:t>
+            </a:r>
+            <a:endParaRPr lang="en-US" sz="1200" dirty="0"/>
+          </a:p>
+          <a:p>
+            <a:pPr algn="l" marL="342900" indent="-342900">
+              <a:lnSpc>
+                <a:spcPts val="1620"/>
+              </a:lnSpc>
+              <a:spcAft>
+                <a:spcPts val="300"/>
+              </a:spcAft>
+              <a:buSzPct val="100000"/>
+              <a:buChar char="•"/>
+            </a:pPr>
+            <a:r>
+              <a:rPr lang="en-US" sz="1200" dirty="0">
+                <a:solidFill>
+                  <a:srgbClr val="1C2833"/>
+                </a:solidFill>
+                <a:latin typeface="Arial" pitchFamily="34" charset="0"/>
+                <a:ea typeface="Arial" pitchFamily="34" charset="-122"/>
+                <a:cs typeface="Arial" pitchFamily="34" charset="-120"/>
+              </a:rPr>
+              <a:t>Pre-bed wind-down?</a:t>
+            </a:r>
+            <a:endParaRPr lang="en-US" sz="1200" dirty="0"/>
+          </a:p>
+          <a:p>
+            <a:pPr algn="l" marL="342900" indent="-342900">
+              <a:lnSpc>
+                <a:spcPts val="1620"/>
+              </a:lnSpc>
+              <a:spcAft>
+                <a:spcPts val="300"/>
+              </a:spcAft>
+              <a:buSzPct val="100000"/>
+              <a:buChar char="•"/>
+            </a:pPr>
+            <a:r>
+              <a:rPr lang="en-US" sz="1200" dirty="0">
+                <a:solidFill>
+                  <a:srgbClr val="1C2833"/>
+                </a:solidFill>
+                <a:latin typeface="Arial" pitchFamily="34" charset="0"/>
+                <a:ea typeface="Arial" pitchFamily="34" charset="-122"/>
+                <a:cs typeface="Arial" pitchFamily="34" charset="-120"/>
+              </a:rPr>
+              <a:t>Sleep target?</a:t>
+            </a:r>
+            <a:endParaRPr lang="en-US" sz="1200" dirty="0"/>
+          </a:p>
+        </p:txBody>
+      </p:sp>
+      <p:sp>
+        <p:nvSpPr>
+          <p:cNvPr id="8" name="Text 6"/>
           <p:cNvSpPr/>
           <p:nvPr/>
         </p:nvSpPr>
@@ -3499,7 +4510,7 @@
                 <a:ea typeface="Georgia" pitchFamily="34" charset="-122"/>
                 <a:cs typeface="Georgia" pitchFamily="34" charset="-120"/>
               </a:rPr>
-              <a:t>Differentiation</a:t>
+              <a:t>Core (35 min) — Design sprints (cont.)</a:t>
             </a:r>
             <a:endParaRPr lang="en-US" sz="1800" dirty="0"/>
           </a:p>
@@ -3513,8 +4524,8 @@
         </p:nvSpPr>
         <p:spPr>
           <a:xfrm>
-            <a:off x="634901" y="883593"/>
-            <a:ext cx="8102798" cy="525661"/>
+            <a:off x="406301" y="870942"/>
+            <a:ext cx="8498026" cy="213271"/>
           </a:xfrm>
           <a:prstGeom prst="rect">
             <a:avLst/>
@@ -3526,15 +4537,17 @@
           <a:bodyPr wrap="square" lIns="0" tIns="0" rIns="0" bIns="0" rtlCol="0" anchor="t"/>
           <a:lstStyle/>
           <a:p>
-            <a:pPr algn="l" marL="342900" indent="-342900">
-              <a:lnSpc>
-                <a:spcPts val="1620"/>
-              </a:lnSpc>
-              <a:spcAft>
-                <a:spcPts val="300"/>
-              </a:spcAft>
-              <a:buSzPct val="100000"/>
-              <a:buChar char="•"/>
+            <a:pPr algn="l" indent="0" marL="0">
+              <a:lnSpc>
+                <a:spcPts val="1680"/>
+              </a:lnSpc>
+              <a:spcBef>
+                <a:spcPts val="300"/>
+              </a:spcBef>
+              <a:spcAft>
+                <a:spcPts val="300"/>
+              </a:spcAft>
+              <a:buNone/>
             </a:pPr>
             <a:r>
               <a:rPr lang="en-US" sz="1200" b="1" dirty="0">
@@ -3545,16 +4558,42 @@
                 <a:ea typeface="Arial" pitchFamily="34" charset="-122"/>
                 <a:cs typeface="Arial" pitchFamily="34" charset="-120"/>
               </a:rPr>
-              <a:t>Tier up:</a:t>
-            </a:r>
-            <a:pPr algn="l" indent="0" marL="0">
+              <a:t>Sprint 4 (5 min) — Realism check.</a:t>
+            </a:r>
+            <a:endParaRPr lang="en-US" sz="1200" dirty="0"/>
+          </a:p>
+        </p:txBody>
+      </p:sp>
+      <p:sp>
+        <p:nvSpPr>
+          <p:cNvPr id="5" name="Text 3"/>
+          <p:cNvSpPr/>
+          <p:nvPr/>
+        </p:nvSpPr>
+        <p:spPr>
+          <a:xfrm>
+            <a:off x="634901" y="1173063"/>
+            <a:ext cx="8102798" cy="525661"/>
+          </a:xfrm>
+          <a:prstGeom prst="rect">
+            <a:avLst/>
+          </a:prstGeom>
+          <a:noFill/>
+          <a:ln/>
+        </p:spPr>
+        <p:txBody>
+          <a:bodyPr wrap="square" lIns="0" tIns="0" rIns="0" bIns="0" rtlCol="0" anchor="t"/>
+          <a:lstStyle/>
+          <a:p>
+            <a:pPr algn="l" marL="342900" indent="-342900">
               <a:lnSpc>
                 <a:spcPts val="1620"/>
               </a:lnSpc>
               <a:spcAft>
                 <a:spcPts val="300"/>
               </a:spcAft>
-              <a:buNone/>
+              <a:buSzPct val="100000"/>
+              <a:buChar char="•"/>
             </a:pPr>
             <a:r>
               <a:rPr lang="en-US" sz="1200" dirty="0">
@@ -3565,7 +4604,7 @@
                 <a:ea typeface="Arial" pitchFamily="34" charset="-122"/>
                 <a:cs typeface="Arial" pitchFamily="34" charset="-120"/>
               </a:rPr>
-              <a:t> Also design a "weekend" version + a "school holiday" version.</a:t>
+              <a:t>Are these times achievable for your actual school week?</a:t>
             </a:r>
             <a:endParaRPr lang="en-US" sz="1200" dirty="0"/>
           </a:p>
@@ -3581,7 +4620,7 @@
               <a:buChar char="•"/>
             </a:pPr>
             <a:r>
-              <a:rPr lang="en-US" sz="1200" b="1" dirty="0">
+              <a:rPr lang="en-US" sz="1200" dirty="0">
                 <a:solidFill>
                   <a:srgbClr val="1C2833"/>
                 </a:solidFill>
@@ -3589,27 +4628,7 @@
                 <a:ea typeface="Arial" pitchFamily="34" charset="-122"/>
                 <a:cs typeface="Arial" pitchFamily="34" charset="-120"/>
               </a:rPr>
-              <a:t>Tier down:</a:t>
-            </a:r>
-            <a:pPr algn="l" indent="0" marL="0">
-              <a:lnSpc>
-                <a:spcPts val="1620"/>
-              </a:lnSpc>
-              <a:spcAft>
-                <a:spcPts val="300"/>
-              </a:spcAft>
-              <a:buNone/>
-            </a:pPr>
-            <a:r>
-              <a:rPr lang="en-US" sz="1200" dirty="0">
-                <a:solidFill>
-                  <a:srgbClr val="1C2833"/>
-                </a:solidFill>
-                <a:latin typeface="Arial" pitchFamily="34" charset="0"/>
-                <a:ea typeface="Arial" pitchFamily="34" charset="-122"/>
-                <a:cs typeface="Arial" pitchFamily="34" charset="-120"/>
-              </a:rPr>
-              <a:t> Pick 3 specific changes (not a full overhaul).</a:t>
+              <a:t>If not, what's the MINIMUM viable change?</a:t>
             </a:r>
             <a:endParaRPr lang="en-US" sz="1200" dirty="0"/>
           </a:p>
@@ -3617,7 +4636,7 @@
       </p:sp>
       <p:sp>
         <p:nvSpPr>
-          <p:cNvPr id="5" name="Text 3"/>
+          <p:cNvPr id="6" name="Text 4"/>
           <p:cNvSpPr/>
           <p:nvPr/>
         </p:nvSpPr>
@@ -3767,7 +4786,7 @@
                 <a:ea typeface="Georgia" pitchFamily="34" charset="-122"/>
                 <a:cs typeface="Georgia" pitchFamily="34" charset="-120"/>
               </a:rPr>
-              <a:t>Teacher notes</a:t>
+              <a:t>Wrap-up (5 min)</a:t>
             </a:r>
             <a:endParaRPr lang="en-US" sz="1800" dirty="0"/>
           </a:p>
@@ -3781,8 +4800,8 @@
         </p:nvSpPr>
         <p:spPr>
           <a:xfrm>
-            <a:off x="406301" y="870942"/>
-            <a:ext cx="8498026" cy="426541"/>
+            <a:off x="634901" y="883593"/>
+            <a:ext cx="8102798" cy="281880"/>
           </a:xfrm>
           <a:prstGeom prst="rect">
             <a:avLst/>
@@ -3794,17 +4813,15 @@
           <a:bodyPr wrap="square" lIns="0" tIns="0" rIns="0" bIns="0" rtlCol="0" anchor="t"/>
           <a:lstStyle/>
           <a:p>
-            <a:pPr algn="l" indent="0" marL="0">
-              <a:lnSpc>
-                <a:spcPts val="1680"/>
-              </a:lnSpc>
-              <a:spcBef>
-                <a:spcPts val="300"/>
-              </a:spcBef>
-              <a:spcAft>
-                <a:spcPts val="300"/>
-              </a:spcAft>
-              <a:buNone/>
+            <a:pPr algn="l" marL="342900" indent="-342900">
+              <a:lnSpc>
+                <a:spcPts val="1620"/>
+              </a:lnSpc>
+              <a:spcAft>
+                <a:spcPts val="300"/>
+              </a:spcAft>
+              <a:buSzPct val="100000"/>
+              <a:buChar char="•"/>
             </a:pPr>
             <a:r>
               <a:rPr lang="en-US" sz="1200" dirty="0">
@@ -3815,7 +4832,7 @@
                 <a:ea typeface="Arial" pitchFamily="34" charset="-122"/>
                 <a:cs typeface="Arial" pitchFamily="34" charset="-120"/>
               </a:rPr>
-              <a:t>– Realism is the #1 thing. A dinacharya that requires getting up at 4am won't be followed. – Some students may push back on family meal times. Don't override the family; suggest small adjustments only.</a:t>
+              <a:t>Plan submitted at door.</a:t>
             </a:r>
             <a:endParaRPr lang="en-US" sz="1200" dirty="0"/>
           </a:p>
